--- a/Customer Shopping Behavior Analysis PPT.pptx
+++ b/Customer Shopping Behavior Analysis PPT.pptx
@@ -194,7 +194,7 @@
           <a:p>
             <a:fld id="{1D8BD707-D9CF-40AE-B4C6-C98DA3205C09}" type="datetimeFigureOut">
               <a:rPr lang="en-US"/>
-              <a:t>5/24/2026</a:t>
+              <a:t>5/25/2026</a:t>
             </a:fld>
             <a:endParaRPr lang="en-US"/>
           </a:p>
@@ -371,7 +371,7 @@
           <a:p>
             <a:fld id="{1D8BD707-D9CF-40AE-B4C6-C98DA3205C09}" type="datetimeFigureOut">
               <a:rPr lang="en-US"/>
-              <a:t>5/24/2026</a:t>
+              <a:t>5/25/2026</a:t>
             </a:fld>
             <a:endParaRPr lang="en-US"/>
           </a:p>
@@ -591,7 +591,7 @@
           <a:p>
             <a:fld id="{1D8BD707-D9CF-40AE-B4C6-C98DA3205C09}" type="datetimeFigureOut">
               <a:rPr lang="en-US"/>
-              <a:t>5/24/2026</a:t>
+              <a:t>5/25/2026</a:t>
             </a:fld>
             <a:endParaRPr lang="en-US"/>
           </a:p>
@@ -739,7 +739,7 @@
           <a:p>
             <a:fld id="{1D8BD707-D9CF-40AE-B4C6-C98DA3205C09}" type="datetimeFigureOut">
               <a:rPr lang="en-US"/>
-              <a:t>5/24/2026</a:t>
+              <a:t>5/25/2026</a:t>
             </a:fld>
             <a:endParaRPr lang="en-US"/>
           </a:p>
@@ -960,7 +960,7 @@
           <a:p>
             <a:fld id="{1D8BD707-D9CF-40AE-B4C6-C98DA3205C09}" type="datetimeFigureOut">
               <a:rPr lang="en-US"/>
-              <a:t>5/24/2026</a:t>
+              <a:t>5/25/2026</a:t>
             </a:fld>
             <a:endParaRPr lang="en-US"/>
           </a:p>
@@ -1257,7 +1257,7 @@
           <a:p>
             <a:fld id="{1D8BD707-D9CF-40AE-B4C6-C98DA3205C09}" type="datetimeFigureOut">
               <a:rPr lang="en-US"/>
-              <a:t>5/24/2026</a:t>
+              <a:t>5/25/2026</a:t>
             </a:fld>
             <a:endParaRPr lang="en-US"/>
           </a:p>
@@ -7821,7 +7821,7 @@
         <p:spPr>
           <a:xfrm>
             <a:off x="7411593" y="6291833"/>
-            <a:ext cx="6125210" cy="1147445"/>
+            <a:ext cx="6125210" cy="1450782"/>
           </a:xfrm>
           <a:prstGeom prst="rect">
             <a:avLst/>
@@ -7861,7 +7861,7 @@
               </a:rPr>
               <a:t>Integration</a:t>
             </a:r>
-            <a:endParaRPr sz="2100">
+            <a:endParaRPr sz="2100" dirty="0">
               <a:latin typeface="Cambria"/>
               <a:cs typeface="Cambria"/>
             </a:endParaRPr>
@@ -7876,156 +7876,16 @@
               </a:spcBef>
             </a:pPr>
             <a:r>
-              <a:rPr sz="1700" dirty="0">
-                <a:solidFill>
-                  <a:srgbClr val="48485A"/>
-                </a:solidFill>
-                <a:latin typeface="Arial MT"/>
-                <a:cs typeface="Arial MT"/>
-              </a:rPr>
-              <a:t>Connected </a:t>
-            </a:r>
-            <a:r>
-              <a:rPr sz="1700" spc="95" dirty="0">
-                <a:solidFill>
-                  <a:srgbClr val="48485A"/>
-                </a:solidFill>
-                <a:latin typeface="Arial MT"/>
-                <a:cs typeface="Arial MT"/>
-              </a:rPr>
-              <a:t>to</a:t>
-            </a:r>
-            <a:r>
-              <a:rPr sz="1700" spc="35" dirty="0">
-                <a:solidFill>
-                  <a:srgbClr val="48485A"/>
-                </a:solidFill>
-                <a:latin typeface="Arial MT"/>
-                <a:cs typeface="Arial MT"/>
-              </a:rPr>
-              <a:t> </a:t>
-            </a:r>
-            <a:r>
-              <a:rPr sz="1700" spc="-25" dirty="0">
-                <a:solidFill>
-                  <a:srgbClr val="48485A"/>
-                </a:solidFill>
-                <a:latin typeface="Arial MT"/>
-                <a:cs typeface="Arial MT"/>
-              </a:rPr>
-              <a:t>MySQL</a:t>
-            </a:r>
-            <a:r>
-              <a:rPr sz="1700" spc="35" dirty="0">
-                <a:solidFill>
-                  <a:srgbClr val="48485A"/>
-                </a:solidFill>
-                <a:latin typeface="Arial MT"/>
-                <a:cs typeface="Arial MT"/>
-              </a:rPr>
-              <a:t> </a:t>
-            </a:r>
-            <a:r>
-              <a:rPr sz="1700" spc="55" dirty="0">
-                <a:solidFill>
-                  <a:srgbClr val="48485A"/>
-                </a:solidFill>
-                <a:latin typeface="Arial MT"/>
-                <a:cs typeface="Arial MT"/>
-              </a:rPr>
-              <a:t>and</a:t>
-            </a:r>
-            <a:r>
-              <a:rPr sz="1700" spc="25" dirty="0">
-                <a:solidFill>
-                  <a:srgbClr val="48485A"/>
-                </a:solidFill>
-                <a:latin typeface="Arial MT"/>
-                <a:cs typeface="Arial MT"/>
-              </a:rPr>
-              <a:t> </a:t>
-            </a:r>
-            <a:r>
-              <a:rPr sz="1700" spc="50" dirty="0">
-                <a:solidFill>
-                  <a:srgbClr val="48485A"/>
-                </a:solidFill>
-                <a:latin typeface="Arial MT"/>
-                <a:cs typeface="Arial MT"/>
-              </a:rPr>
-              <a:t>loaded</a:t>
-            </a:r>
-            <a:r>
-              <a:rPr sz="1700" spc="30" dirty="0">
-                <a:solidFill>
-                  <a:srgbClr val="48485A"/>
-                </a:solidFill>
-                <a:latin typeface="Arial MT"/>
-                <a:cs typeface="Arial MT"/>
-              </a:rPr>
-              <a:t> </a:t>
-            </a:r>
-            <a:r>
-              <a:rPr sz="1700" dirty="0">
-                <a:solidFill>
-                  <a:srgbClr val="48485A"/>
-                </a:solidFill>
-                <a:latin typeface="Arial MT"/>
-                <a:cs typeface="Arial MT"/>
-              </a:rPr>
-              <a:t>cleaned DataFrame</a:t>
-            </a:r>
-            <a:r>
-              <a:rPr sz="1700" spc="30" dirty="0">
-                <a:solidFill>
-                  <a:srgbClr val="48485A"/>
-                </a:solidFill>
-                <a:latin typeface="Arial MT"/>
-                <a:cs typeface="Arial MT"/>
-              </a:rPr>
-              <a:t> </a:t>
-            </a:r>
-            <a:r>
-              <a:rPr sz="1700" spc="95" dirty="0">
-                <a:solidFill>
-                  <a:srgbClr val="48485A"/>
-                </a:solidFill>
-                <a:latin typeface="Arial MT"/>
-                <a:cs typeface="Arial MT"/>
-              </a:rPr>
-              <a:t>for</a:t>
-            </a:r>
-            <a:r>
-              <a:rPr sz="1700" spc="60" dirty="0">
-                <a:solidFill>
-                  <a:srgbClr val="48485A"/>
-                </a:solidFill>
-                <a:latin typeface="Arial MT"/>
-                <a:cs typeface="Arial MT"/>
-              </a:rPr>
-              <a:t> </a:t>
-            </a:r>
-            <a:r>
-              <a:rPr sz="1700" spc="-25" dirty="0">
-                <a:solidFill>
-                  <a:srgbClr val="48485A"/>
-                </a:solidFill>
-                <a:latin typeface="Arial MT"/>
-                <a:cs typeface="Arial MT"/>
-              </a:rPr>
-              <a:t>SQL </a:t>
-            </a:r>
-            <a:r>
-              <a:rPr sz="1700" spc="-10" dirty="0">
-                <a:solidFill>
-                  <a:srgbClr val="48485A"/>
-                </a:solidFill>
-                <a:latin typeface="Arial MT"/>
-                <a:cs typeface="Arial MT"/>
-              </a:rPr>
-              <a:t>analysis</a:t>
-            </a:r>
-            <a:endParaRPr sz="1700">
+              <a:rPr lang="en-US" sz="1700" dirty="0">
+                <a:solidFill>
+                  <a:srgbClr val="48485A"/>
+                </a:solidFill>
+                <a:latin typeface="Arial MT"/>
+                <a:cs typeface="Arial MT"/>
+              </a:rPr>
+              <a:t>Integrated cleaned customer shopping dataset into SQL Server and performed advanced analytical queries for business insights.</a:t>
+            </a:r>
+            <a:endParaRPr sz="1700" dirty="0">
               <a:latin typeface="Arial MT"/>
               <a:cs typeface="Arial MT"/>
             </a:endParaRPr>
